--- a/apps/shell/resources/templates/Startup Pitch.pptx
+++ b/apps/shell/resources/templates/Startup Pitch.pptx
@@ -3324,7 +3324,7 @@
                 </a:solidFill>
                 <a:latin typeface="Calibri"/>
               </a:rPr>
-              <a:t>PLOT DOCS SUITE  /  TEMPLATE LIBRARY</a:t>
+              <a:t>PLOT DOCS  /  TEMPLATE LIBRARY</a:t>
             </a:r>
           </a:p>
         </p:txBody>
@@ -3464,7 +3464,7 @@
                 </a:solidFill>
                 <a:latin typeface="Calibri"/>
               </a:rPr>
-              <a:t>PLOT DOCS SUITE</a:t>
+              <a:t>PLOT DOCS</a:t>
             </a:r>
           </a:p>
         </p:txBody>
@@ -4300,7 +4300,7 @@
                 </a:solidFill>
                 <a:latin typeface="Calibri"/>
               </a:rPr>
-              <a:t>PLOT DOCS SUITE</a:t>
+              <a:t>PLOT DOCS</a:t>
             </a:r>
           </a:p>
         </p:txBody>
@@ -4488,7 +4488,7 @@
                 </a:solidFill>
                 <a:latin typeface="Calibri"/>
               </a:rPr>
-              <a:t>Plot Docs Suite workspace</a:t>
+              <a:t>Plot Docs workspace</a:t>
             </a:r>
           </a:p>
         </p:txBody>
@@ -4872,7 +4872,7 @@
                 </a:solidFill>
                 <a:latin typeface="Calibri"/>
               </a:rPr>
-              <a:t>PLOT DOCS SUITE</a:t>
+              <a:t>PLOT DOCS</a:t>
             </a:r>
           </a:p>
         </p:txBody>
@@ -5327,7 +5327,7 @@
                 </a:solidFill>
                 <a:latin typeface="Calibri"/>
               </a:rPr>
-              <a:t>PLOT DOCS SUITE</a:t>
+              <a:t>PLOT DOCS</a:t>
             </a:r>
           </a:p>
         </p:txBody>
@@ -6044,7 +6044,7 @@
                 </a:solidFill>
                 <a:latin typeface="Calibri"/>
               </a:rPr>
-              <a:t>PLOT DOCS SUITE</a:t>
+              <a:t>PLOT DOCS</a:t>
             </a:r>
           </a:p>
         </p:txBody>
@@ -6149,7 +6149,7 @@
                 </a:solidFill>
                 <a:latin typeface="Georgia"/>
               </a:rPr>
-              <a:t>Raising $6M to make Plot Docs Suite the default workspace for 10,000 teams.</a:t>
+              <a:t>Raising $6M to make Plot Docs the default workspace for 10,000 teams.</a:t>
             </a:r>
           </a:p>
         </p:txBody>
